--- a/доки/защита.pptx
+++ b/доки/защита.pptx
@@ -14894,32 +14894,49 @@
       </p:pic>
       <p:pic>
         <p:nvPicPr>
-          <p:cNvPr id="11" name="Рисунок 10">
+          <p:cNvPr id="1026" name="Picture 2">
             <a:extLst>
               <a:ext uri="{FF2B5EF4-FFF2-40B4-BE49-F238E27FC236}">
-                <a16:creationId xmlns:a16="http://schemas.microsoft.com/office/drawing/2014/main" id="{F0E194C1-8A3D-C2AF-602E-05DD0A11EF10}"/>
+                <a16:creationId xmlns:a16="http://schemas.microsoft.com/office/drawing/2014/main" id="{A2265BDA-E427-A15B-20C8-48E9FB313C91}"/>
               </a:ext>
             </a:extLst>
           </p:cNvPr>
           <p:cNvPicPr>
-            <a:picLocks noChangeAspect="1"/>
+            <a:picLocks noChangeAspect="1" noChangeArrowheads="1"/>
           </p:cNvPicPr>
           <p:nvPr/>
         </p:nvPicPr>
         <p:blipFill>
-          <a:blip r:embed="rId4"/>
+          <a:blip r:embed="rId4">
+            <a:extLst>
+              <a:ext uri="{28A0092B-C50C-407E-A947-70E740481C1C}">
+                <a14:useLocalDpi xmlns:a14="http://schemas.microsoft.com/office/drawing/2010/main" val="0"/>
+              </a:ext>
+            </a:extLst>
+          </a:blip>
+          <a:srcRect/>
           <a:stretch>
             <a:fillRect/>
           </a:stretch>
         </p:blipFill>
-        <p:spPr>
+        <p:spPr bwMode="auto">
           <a:xfrm>
-            <a:off x="208344" y="1620072"/>
-            <a:ext cx="3906021" cy="3617858"/>
+            <a:off x="116418" y="1620071"/>
+            <a:ext cx="3886684" cy="3617858"/>
           </a:xfrm>
           <a:prstGeom prst="rect">
             <a:avLst/>
           </a:prstGeom>
+          <a:noFill/>
+          <a:extLst>
+            <a:ext uri="{909E8E84-426E-40DD-AFC4-6F175D3DCCD1}">
+              <a14:hiddenFill xmlns:a14="http://schemas.microsoft.com/office/drawing/2010/main">
+                <a:solidFill>
+                  <a:srgbClr val="FFFFFF"/>
+                </a:solidFill>
+              </a14:hiddenFill>
+            </a:ext>
+          </a:extLst>
         </p:spPr>
       </p:pic>
     </p:spTree>
@@ -18272,7 +18289,7 @@
     <mc:Choice Requires="p14">
       <p:transition p14:dur="10" advTm="165000"/>
     </mc:Choice>
-    <mc:Fallback xmlns:p15="http://schemas.microsoft.com/office/powerpoint/2012/main" xmlns="">
+    <mc:Fallback xmlns="" xmlns:p15="http://schemas.microsoft.com/office/powerpoint/2012/main">
       <p:transition advTm="165000"/>
     </mc:Fallback>
   </mc:AlternateContent>
